--- a/docs/competition/submission/Reqover_3min_video_deck.pptx
+++ b/docs/competition/submission/Reqover_3min_video_deck.pptx
@@ -3192,7 +3192,7 @@
                 <a:ea typeface="Apple SD Gothic Neo"/>
                 <a:cs typeface="Apple SD Gothic Neo"/>
               </a:rPr>
-              <a:t>35</a:t>
+              <a:t>121</a:t>
             </a:r>
           </a:p>
         </p:txBody>
@@ -3639,7 +3639,7 @@
                 <a:cs typeface="Apple SD Gothic Neo"/>
               </a:rPr>
               <a:t>REQOVER
-0.1.0</a:t>
+0.2.0</a:t>
             </a:r>
           </a:p>
         </p:txBody>
